--- a/docs/Customer_Scenario_Slide.pptx
+++ b/docs/Customer_Scenario_Slide.pptx
@@ -3903,7 +3903,7 @@
               <a:rPr sz="2800">
                 <a:latin typeface="Segoe UI Emoji"/>
               </a:rPr>
-              <a:t>⚡</a:t>
+              <a:t>🕐</a:t>
             </a:r>
           </a:p>
         </p:txBody>
